--- a/deck/namp-2026/out/2026_납품대금연동제_실태조사_제안서_발췌11p.pptx
+++ b/deck/namp-2026/out/2026_납품대금연동제_실태조사_제안서_발췌11p.pptx
@@ -2039,7 +2039,7 @@
             <a:r>
               <a:rPr lang="en-US" sz="2265" b="1" dirty="0">
                 <a:solidFill>
-                  <a:srgbClr val="DDE1E8"/>
+                  <a:srgbClr val="B9BEC6"/>
                 </a:solidFill>
                 <a:latin typeface="KoPub돋움체 Bold" pitchFamily="34" charset="0"/>
                 <a:ea typeface="KoPub돋움체 Bold" pitchFamily="34" charset="-122"/>
@@ -2081,7 +2081,7 @@
             <a:r>
               <a:rPr lang="en-US" sz="2265" b="1" dirty="0">
                 <a:solidFill>
-                  <a:srgbClr val="DDE1E8"/>
+                  <a:srgbClr val="B9BEC6"/>
                 </a:solidFill>
                 <a:latin typeface="KoPub돋움체 Bold" pitchFamily="34" charset="0"/>
                 <a:ea typeface="KoPub돋움체 Bold" pitchFamily="34" charset="-122"/>
@@ -2121,7 +2121,7 @@
               <a:buNone/>
             </a:pPr>
             <a:r>
-              <a:rPr lang="en-US" sz="1510" b="1" dirty="0">
+              <a:rPr lang="en-US" sz="1490" b="1" dirty="0">
                 <a:solidFill>
                   <a:srgbClr val="1A1A1A"/>
                 </a:solidFill>
@@ -2138,7 +2138,7 @@
               <a:buNone/>
             </a:pPr>
             <a:r>
-              <a:rPr lang="en-US" sz="1510" b="1" dirty="0">
+              <a:rPr lang="en-US" sz="1490" b="1" dirty="0">
                 <a:solidFill>
                   <a:srgbClr val="133784"/>
                 </a:solidFill>
@@ -2155,7 +2155,7 @@
               <a:buNone/>
             </a:pPr>
             <a:r>
-              <a:rPr lang="en-US" sz="1510" b="1" dirty="0">
+              <a:rPr lang="en-US" sz="1490" b="1" dirty="0">
                 <a:solidFill>
                   <a:srgbClr val="1A1A1A"/>
                 </a:solidFill>
@@ -2165,7 +2165,7 @@
               </a:rPr>
               <a:t>을 사전 배정</a:t>
             </a:r>
-            <a:endParaRPr lang="en-US" sz="1510" dirty="0"/>
+            <a:endParaRPr lang="en-US" sz="1490" dirty="0"/>
           </a:p>
         </p:txBody>
       </p:sp>
@@ -2541,7 +2541,7 @@
               <a:buNone/>
             </a:pPr>
             <a:r>
-              <a:rPr lang="en-US" sz="1110" dirty="0">
+              <a:rPr lang="en-US" sz="1090" dirty="0">
                 <a:solidFill>
                   <a:srgbClr val="1A1A1A"/>
                 </a:solidFill>
@@ -2551,7 +2551,7 @@
               </a:rPr>
               <a:t>미응답 독려 강화(문자·메일 재안내 2회 추가), 응답지원 창구 운영시간 연장</a:t>
             </a:r>
-            <a:endParaRPr lang="en-US" sz="1110" dirty="0"/>
+            <a:endParaRPr lang="en-US" sz="1090" dirty="0"/>
           </a:p>
         </p:txBody>
       </p:sp>
@@ -6147,7 +6147,7 @@
               <a:buNone/>
             </a:pPr>
             <a:r>
-              <a:rPr lang="en-US" sz="1040" dirty="0">
+              <a:rPr lang="en-US" sz="1000" dirty="0">
                 <a:solidFill>
                   <a:srgbClr val="1A1A1A"/>
                 </a:solidFill>
@@ -6157,7 +6157,7 @@
               </a:rPr>
               <a:t>발동 기준 충족 시 필요한 추가 접촉·독려 재원은</a:t>
             </a:r>
-            <a:endParaRPr lang="en-US" sz="1040" dirty="0"/>
+            <a:endParaRPr lang="en-US" sz="1000" dirty="0"/>
           </a:p>
           <a:p>
             <a:pPr algn="l" indent="0" marL="0">
@@ -6167,7 +6167,7 @@
               <a:buNone/>
             </a:pPr>
             <a:r>
-              <a:rPr lang="en-US" sz="1040" dirty="0">
+              <a:rPr lang="en-US" sz="1000" dirty="0">
                 <a:solidFill>
                   <a:srgbClr val="1A1A1A"/>
                 </a:solidFill>
@@ -6177,7 +6177,7 @@
               </a:rPr>
               <a:t>회수 예비비로 별도 편성하며, 미사용분은 발주기관과</a:t>
             </a:r>
-            <a:endParaRPr lang="en-US" sz="1040" dirty="0"/>
+            <a:endParaRPr lang="en-US" sz="1000" dirty="0"/>
           </a:p>
           <a:p>
             <a:pPr algn="l" indent="0" marL="0">
@@ -6187,7 +6187,7 @@
               <a:buNone/>
             </a:pPr>
             <a:r>
-              <a:rPr lang="en-US" sz="1040" dirty="0">
+              <a:rPr lang="en-US" sz="1000" dirty="0">
                 <a:solidFill>
                   <a:srgbClr val="1A1A1A"/>
                 </a:solidFill>
@@ -6197,7 +6197,7 @@
               </a:rPr>
               <a:t>협의해 추가 분석에 전용</a:t>
             </a:r>
-            <a:endParaRPr lang="en-US" sz="1040" dirty="0"/>
+            <a:endParaRPr lang="en-US" sz="1000" dirty="0"/>
           </a:p>
         </p:txBody>
       </p:sp>
@@ -6455,7 +6455,7 @@
               <a:buNone/>
             </a:pPr>
             <a:r>
-              <a:rPr lang="en-US" sz="1040" dirty="0">
+              <a:rPr lang="en-US" sz="1020" dirty="0">
                 <a:solidFill>
                   <a:srgbClr val="1A1A1A"/>
                 </a:solidFill>
@@ -6465,7 +6465,7 @@
               </a:rPr>
               <a:t>회수 목표선 미달이 3주 연속되면 유효표본 목표 또는</a:t>
             </a:r>
-            <a:endParaRPr lang="en-US" sz="1040" dirty="0"/>
+            <a:endParaRPr lang="en-US" sz="1020" dirty="0"/>
           </a:p>
           <a:p>
             <a:pPr algn="l" indent="0" marL="0">
@@ -6475,7 +6475,7 @@
               <a:buNone/>
             </a:pPr>
             <a:r>
-              <a:rPr lang="en-US" sz="1040" dirty="0">
+              <a:rPr lang="en-US" sz="1020" dirty="0">
                 <a:solidFill>
                   <a:srgbClr val="1A1A1A"/>
                 </a:solidFill>
@@ -6485,7 +6485,7 @@
               </a:rPr>
               <a:t>조사 기간의 조정을 발주기관과 협의</a:t>
             </a:r>
-            <a:endParaRPr lang="en-US" sz="1040" dirty="0"/>
+            <a:endParaRPr lang="en-US" sz="1020" dirty="0"/>
           </a:p>
         </p:txBody>
       </p:sp>
@@ -6896,7 +6896,7 @@
             <a:r>
               <a:rPr lang="en-US" sz="2265" b="1" dirty="0">
                 <a:solidFill>
-                  <a:srgbClr val="DDE1E8"/>
+                  <a:srgbClr val="B9BEC6"/>
                 </a:solidFill>
                 <a:latin typeface="KoPub돋움체 Bold" pitchFamily="34" charset="0"/>
                 <a:ea typeface="KoPub돋움체 Bold" pitchFamily="34" charset="-122"/>
@@ -6938,7 +6938,7 @@
             <a:r>
               <a:rPr lang="en-US" sz="2265" b="1" dirty="0">
                 <a:solidFill>
-                  <a:srgbClr val="DDE1E8"/>
+                  <a:srgbClr val="B9BEC6"/>
                 </a:solidFill>
                 <a:latin typeface="KoPub돋움체 Bold" pitchFamily="34" charset="0"/>
                 <a:ea typeface="KoPub돋움체 Bold" pitchFamily="34" charset="-122"/>
@@ -9090,7 +9090,7 @@
               <a:buNone/>
             </a:pPr>
             <a:r>
-              <a:rPr lang="en-US" sz="1030" dirty="0">
+              <a:rPr lang="en-US" sz="1010" dirty="0">
                 <a:solidFill>
                   <a:srgbClr val="1A1A1A"/>
                 </a:solidFill>
@@ -9100,7 +9100,7 @@
               </a:rPr>
               <a:t>사전 선별조사 5,600 ·  발송 3,078 · 전화독려 10,500 · 응답 확보 20,000 · 자료검증 4,500 · 시스템 5,000 · 교육 2,000 · 인쇄 2,000 · 회수 예비비 7,587</a:t>
             </a:r>
-            <a:endParaRPr lang="en-US" sz="1030" dirty="0"/>
+            <a:endParaRPr lang="en-US" sz="1010" dirty="0"/>
           </a:p>
         </p:txBody>
       </p:sp>
@@ -10430,7 +10430,7 @@
             <a:r>
               <a:rPr lang="en-US" sz="2130" b="1" dirty="0">
                 <a:solidFill>
-                  <a:srgbClr val="DDE1E8"/>
+                  <a:srgbClr val="B9BEC6"/>
                 </a:solidFill>
                 <a:latin typeface="KoPub돋움체 Bold" pitchFamily="34" charset="0"/>
                 <a:ea typeface="KoPub돋움체 Bold" pitchFamily="34" charset="-122"/>
@@ -10472,7 +10472,7 @@
             <a:r>
               <a:rPr lang="en-US" sz="2130" b="1" dirty="0">
                 <a:solidFill>
-                  <a:srgbClr val="DDE1E8"/>
+                  <a:srgbClr val="B9BEC6"/>
                 </a:solidFill>
                 <a:latin typeface="KoPub돋움체 Bold" pitchFamily="34" charset="0"/>
                 <a:ea typeface="KoPub돋움체 Bold" pitchFamily="34" charset="-122"/>
@@ -10512,7 +10512,7 @@
               <a:buNone/>
             </a:pPr>
             <a:r>
-              <a:rPr lang="en-US" sz="1260" b="1" dirty="0">
+              <a:rPr lang="en-US" sz="1220" b="1" dirty="0">
                 <a:solidFill>
                   <a:srgbClr val="1A1A1A"/>
                 </a:solidFill>
@@ -10529,7 +10529,7 @@
               <a:buNone/>
             </a:pPr>
             <a:r>
-              <a:rPr lang="en-US" sz="1260" b="1" dirty="0">
+              <a:rPr lang="en-US" sz="1220" b="1" dirty="0">
                 <a:solidFill>
                   <a:srgbClr val="133784"/>
                 </a:solidFill>
@@ -10539,7 +10539,7 @@
               </a:rPr>
               <a:t>3개 항목에 미리 대응</a:t>
             </a:r>
-            <a:endParaRPr lang="en-US" sz="1260" dirty="0"/>
+            <a:endParaRPr lang="en-US" sz="1220" dirty="0"/>
           </a:p>
         </p:txBody>
       </p:sp>
@@ -11021,7 +11021,7 @@
               <a:buNone/>
             </a:pPr>
             <a:r>
-              <a:rPr lang="en-US" sz="1060" dirty="0">
+              <a:rPr lang="en-US" sz="1040" dirty="0">
                 <a:solidFill>
                   <a:srgbClr val="1A1A1A"/>
                 </a:solidFill>
@@ -11031,7 +11031,7 @@
               </a:rPr>
               <a:t>온라인 자기기입 전용, 응답거부 코드 부여,</a:t>
             </a:r>
-            <a:endParaRPr lang="en-US" sz="1060" dirty="0"/>
+            <a:endParaRPr lang="en-US" sz="1040" dirty="0"/>
           </a:p>
           <a:p>
             <a:pPr algn="l" indent="0" marL="0">
@@ -11041,7 +11041,7 @@
               <a:buNone/>
             </a:pPr>
             <a:r>
-              <a:rPr lang="en-US" sz="1060" dirty="0">
+              <a:rPr lang="en-US" sz="1040" dirty="0">
                 <a:solidFill>
                   <a:srgbClr val="1A1A1A"/>
                 </a:solidFill>
@@ -11051,7 +11051,7 @@
               </a:rPr>
               <a:t>비식별 집계 공표 및 원자료의 발주기관 이전을 사전 고지</a:t>
             </a:r>
-            <a:endParaRPr lang="en-US" sz="1060" dirty="0"/>
+            <a:endParaRPr lang="en-US" sz="1040" dirty="0"/>
           </a:p>
         </p:txBody>
       </p:sp>
@@ -13481,7 +13481,7 @@
             <a:r>
               <a:rPr lang="en-US" sz="2265" b="1" dirty="0">
                 <a:solidFill>
-                  <a:srgbClr val="DDE1E8"/>
+                  <a:srgbClr val="B9BEC6"/>
                 </a:solidFill>
                 <a:latin typeface="KoPub돋움체 Bold" pitchFamily="34" charset="0"/>
                 <a:ea typeface="KoPub돋움체 Bold" pitchFamily="34" charset="-122"/>
@@ -13523,7 +13523,7 @@
             <a:r>
               <a:rPr lang="en-US" sz="2265" b="1" dirty="0">
                 <a:solidFill>
-                  <a:srgbClr val="DDE1E8"/>
+                  <a:srgbClr val="B9BEC6"/>
                 </a:solidFill>
                 <a:latin typeface="KoPub돋움체 Bold" pitchFamily="34" charset="0"/>
                 <a:ea typeface="KoPub돋움체 Bold" pitchFamily="34" charset="-122"/>
@@ -13894,7 +13894,7 @@
               <a:buNone/>
             </a:pPr>
             <a:r>
-              <a:rPr lang="en-US" sz="1090" dirty="0">
+              <a:rPr lang="en-US" sz="1050" dirty="0">
                 <a:solidFill>
                   <a:srgbClr val="1A1A1A"/>
                 </a:solidFill>
@@ -13904,7 +13904,7 @@
               </a:rPr>
               <a:t>온라인 자기기입 중심: 조사원은 판별조사</a:t>
             </a:r>
-            <a:endParaRPr lang="en-US" sz="1090" dirty="0"/>
+            <a:endParaRPr lang="en-US" sz="1050" dirty="0"/>
           </a:p>
           <a:p>
             <a:pPr algn="l" indent="0" marL="0">
@@ -13914,7 +13914,7 @@
               <a:buNone/>
             </a:pPr>
             <a:r>
-              <a:rPr lang="en-US" sz="1090" dirty="0">
+              <a:rPr lang="en-US" sz="1050" dirty="0">
                 <a:solidFill>
                   <a:srgbClr val="1A1A1A"/>
                 </a:solidFill>
@@ -13924,7 +13924,7 @@
               </a:rPr>
               <a:t>접촉·미응답 독려·전화조사(CATI)·현장 보완에 집중</a:t>
             </a:r>
-            <a:endParaRPr lang="en-US" sz="1090" dirty="0"/>
+            <a:endParaRPr lang="en-US" sz="1050" dirty="0"/>
           </a:p>
         </p:txBody>
       </p:sp>
@@ -14043,7 +14043,7 @@
               <a:buNone/>
             </a:pPr>
             <a:r>
-              <a:rPr lang="en-US" sz="1150" dirty="0">
+              <a:rPr lang="en-US" sz="1130" dirty="0">
                 <a:solidFill>
                   <a:srgbClr val="1A1A1A"/>
                 </a:solidFill>
@@ -14053,7 +14053,7 @@
               </a:rPr>
               <a:t>유효표본 3,000개사와 업종 5구분 × 규모 2구분,</a:t>
             </a:r>
-            <a:endParaRPr lang="en-US" sz="1150" dirty="0"/>
+            <a:endParaRPr lang="en-US" sz="1130" dirty="0"/>
           </a:p>
           <a:p>
             <a:pPr algn="l" indent="0" marL="0">
@@ -14063,7 +14063,7 @@
               <a:buNone/>
             </a:pPr>
             <a:r>
-              <a:rPr lang="en-US" sz="1150" dirty="0">
+              <a:rPr lang="en-US" sz="1130" dirty="0">
                 <a:solidFill>
                   <a:srgbClr val="1A1A1A"/>
                 </a:solidFill>
@@ -14073,7 +14073,7 @@
               </a:rPr>
               <a:t>10개 관리 단위 물량에 비례해 배치</a:t>
             </a:r>
-            <a:endParaRPr lang="en-US" sz="1150" dirty="0"/>
+            <a:endParaRPr lang="en-US" sz="1130" dirty="0"/>
           </a:p>
         </p:txBody>
       </p:sp>
@@ -16427,7 +16427,7 @@
             <a:r>
               <a:rPr lang="en-US" sz="2265" b="1" dirty="0">
                 <a:solidFill>
-                  <a:srgbClr val="DDE1E8"/>
+                  <a:srgbClr val="B9BEC6"/>
                 </a:solidFill>
                 <a:latin typeface="KoPub돋움체 Bold" pitchFamily="34" charset="0"/>
                 <a:ea typeface="KoPub돋움체 Bold" pitchFamily="34" charset="-122"/>
@@ -16469,7 +16469,7 @@
             <a:r>
               <a:rPr lang="en-US" sz="2265" b="1" dirty="0">
                 <a:solidFill>
-                  <a:srgbClr val="DDE1E8"/>
+                  <a:srgbClr val="B9BEC6"/>
                 </a:solidFill>
                 <a:latin typeface="KoPub돋움체 Bold" pitchFamily="34" charset="0"/>
                 <a:ea typeface="KoPub돋움체 Bold" pitchFamily="34" charset="-122"/>
@@ -16509,7 +16509,7 @@
               <a:buNone/>
             </a:pPr>
             <a:r>
-              <a:rPr lang="en-US" sz="1330" b="1" dirty="0">
+              <a:rPr lang="en-US" sz="1290" b="1" dirty="0">
                 <a:solidFill>
                   <a:srgbClr val="133784"/>
                 </a:solidFill>
@@ -16519,7 +16519,7 @@
               </a:rPr>
               <a:t>설계가중부터 무응답 보정·사후층화까지 단계별로 가중치를 산정하고, 상대표준오차·설계효과로 정밀도를 정직하게 검증</a:t>
             </a:r>
-            <a:endParaRPr lang="en-US" sz="1330" dirty="0"/>
+            <a:endParaRPr lang="en-US" sz="1290" dirty="0"/>
           </a:p>
         </p:txBody>
       </p:sp>
@@ -19247,7 +19247,7 @@
             <a:r>
               <a:rPr lang="en-US" sz="2265" b="1" dirty="0">
                 <a:solidFill>
-                  <a:srgbClr val="DDE1E8"/>
+                  <a:srgbClr val="B9BEC6"/>
                 </a:solidFill>
                 <a:latin typeface="KoPub돋움체 Bold" pitchFamily="34" charset="0"/>
                 <a:ea typeface="KoPub돋움체 Bold" pitchFamily="34" charset="-122"/>
@@ -19289,7 +19289,7 @@
             <a:r>
               <a:rPr lang="en-US" sz="2265" b="1" dirty="0">
                 <a:solidFill>
-                  <a:srgbClr val="DDE1E8"/>
+                  <a:srgbClr val="B9BEC6"/>
                 </a:solidFill>
                 <a:latin typeface="KoPub돋움체 Bold" pitchFamily="34" charset="0"/>
                 <a:ea typeface="KoPub돋움체 Bold" pitchFamily="34" charset="-122"/>
@@ -19329,7 +19329,7 @@
               <a:buNone/>
             </a:pPr>
             <a:r>
-              <a:rPr lang="en-US" sz="1450" b="1" dirty="0">
+              <a:rPr lang="en-US" sz="1410" b="1" dirty="0">
                 <a:solidFill>
                   <a:srgbClr val="133784"/>
                 </a:solidFill>
@@ -19339,7 +19339,7 @@
               </a:rPr>
               <a:t>승인 심사 요건에 로드맵을 항목별로 대응하고, 재단 DB와 성격이 다르다는 점을 제시해 사업의 정당성을 확보</a:t>
             </a:r>
-            <a:endParaRPr lang="en-US" sz="1450" dirty="0"/>
+            <a:endParaRPr lang="en-US" sz="1410" dirty="0"/>
           </a:p>
         </p:txBody>
       </p:sp>
@@ -22440,7 +22440,7 @@
             <a:r>
               <a:rPr lang="en-US" sz="2265" b="1" dirty="0">
                 <a:solidFill>
-                  <a:srgbClr val="DDE1E8"/>
+                  <a:srgbClr val="B9BEC6"/>
                 </a:solidFill>
                 <a:latin typeface="KoPub돋움체 Bold" pitchFamily="34" charset="0"/>
                 <a:ea typeface="KoPub돋움체 Bold" pitchFamily="34" charset="-122"/>
@@ -22482,7 +22482,7 @@
             <a:r>
               <a:rPr lang="en-US" sz="2265" b="1" dirty="0">
                 <a:solidFill>
-                  <a:srgbClr val="DDE1E8"/>
+                  <a:srgbClr val="B9BEC6"/>
                 </a:solidFill>
                 <a:latin typeface="KoPub돋움체 Bold" pitchFamily="34" charset="0"/>
                 <a:ea typeface="KoPub돋움체 Bold" pitchFamily="34" charset="-122"/>
@@ -24943,7 +24943,7 @@
               <a:buNone/>
             </a:pPr>
             <a:r>
-              <a:rPr lang="en-US" sz="1070" dirty="0">
+              <a:rPr lang="en-US" sz="1030" dirty="0">
                 <a:solidFill>
                   <a:srgbClr val="1A1A1A"/>
                 </a:solidFill>
@@ -24953,7 +24953,7 @@
               </a:rPr>
               <a:t>모집단 활용·조사항목 검증 3구분·추진일정</a:t>
             </a:r>
-            <a:endParaRPr lang="en-US" sz="1070" dirty="0"/>
+            <a:endParaRPr lang="en-US" sz="1030" dirty="0"/>
           </a:p>
         </p:txBody>
       </p:sp>
@@ -26067,7 +26067,7 @@
             <a:r>
               <a:rPr lang="en-US" sz="2265" b="1" dirty="0">
                 <a:solidFill>
-                  <a:srgbClr val="DDE1E8"/>
+                  <a:srgbClr val="B9BEC6"/>
                 </a:solidFill>
                 <a:latin typeface="KoPub돋움체 Bold" pitchFamily="34" charset="0"/>
                 <a:ea typeface="KoPub돋움체 Bold" pitchFamily="34" charset="-122"/>
@@ -26109,7 +26109,7 @@
             <a:r>
               <a:rPr lang="en-US" sz="2265" b="1" dirty="0">
                 <a:solidFill>
-                  <a:srgbClr val="DDE1E8"/>
+                  <a:srgbClr val="B9BEC6"/>
                 </a:solidFill>
                 <a:latin typeface="KoPub돋움체 Bold" pitchFamily="34" charset="0"/>
                 <a:ea typeface="KoPub돋움체 Bold" pitchFamily="34" charset="-122"/>
@@ -26149,7 +26149,7 @@
               <a:buNone/>
             </a:pPr>
             <a:r>
-              <a:rPr lang="en-US" sz="1410" b="1" dirty="0">
+              <a:rPr lang="en-US" sz="1370" b="1" dirty="0">
                 <a:solidFill>
                   <a:srgbClr val="133784"/>
                 </a:solidFill>
@@ -26159,7 +26159,7 @@
               </a:rPr>
               <a:t>기본항목을 제외한 문항 단위 대조표를 예비조사 확정 시 작성하고, 대응 문항 수 ÷ 본 조사 문항 수로 중복률을 산출</a:t>
             </a:r>
-            <a:endParaRPr lang="en-US" sz="1410" dirty="0"/>
+            <a:endParaRPr lang="en-US" sz="1370" dirty="0"/>
           </a:p>
         </p:txBody>
       </p:sp>
@@ -29124,7 +29124,7 @@
             <a:r>
               <a:rPr lang="en-US" sz="2130" b="1" dirty="0">
                 <a:solidFill>
-                  <a:srgbClr val="DDE1E8"/>
+                  <a:srgbClr val="B9BEC6"/>
                 </a:solidFill>
                 <a:latin typeface="KoPub돋움체 Bold" pitchFamily="34" charset="0"/>
                 <a:ea typeface="KoPub돋움체 Bold" pitchFamily="34" charset="-122"/>
@@ -29166,7 +29166,7 @@
             <a:r>
               <a:rPr lang="en-US" sz="2130" b="1" dirty="0">
                 <a:solidFill>
-                  <a:srgbClr val="DDE1E8"/>
+                  <a:srgbClr val="B9BEC6"/>
                 </a:solidFill>
                 <a:latin typeface="KoPub돋움체 Bold" pitchFamily="34" charset="0"/>
                 <a:ea typeface="KoPub돋움체 Bold" pitchFamily="34" charset="-122"/>
@@ -29206,7 +29206,7 @@
               <a:buNone/>
             </a:pPr>
             <a:r>
-              <a:rPr lang="en-US" sz="1420" b="1" dirty="0">
+              <a:rPr lang="en-US" sz="1400" b="1" dirty="0">
                 <a:solidFill>
                   <a:srgbClr val="133784"/>
                 </a:solidFill>
@@ -29216,7 +29216,7 @@
               </a:rPr>
               <a:t>통계법 시행규칙 제12조 법정 첨부서류 8종 중 해당 7종에 본과업 산출물을 1:1 대응시켜 사전 작성·제공</a:t>
             </a:r>
-            <a:endParaRPr lang="en-US" sz="1420" dirty="0"/>
+            <a:endParaRPr lang="en-US" sz="1400" dirty="0"/>
           </a:p>
         </p:txBody>
       </p:sp>
@@ -32530,7 +32530,7 @@
               <a:buNone/>
             </a:pPr>
             <a:r>
-              <a:rPr lang="en-US" sz="1070" b="1" dirty="0">
+              <a:rPr lang="en-US" sz="1050" b="1" dirty="0">
                 <a:solidFill>
                   <a:srgbClr val="052A77"/>
                 </a:solidFill>
@@ -32540,7 +32540,7 @@
               </a:rPr>
               <a:t>통계작성기관·승인신청인은 착수보고 시 확정 /</a:t>
             </a:r>
-            <a:endParaRPr lang="en-US" sz="1070" dirty="0"/>
+            <a:endParaRPr lang="en-US" sz="1050" dirty="0"/>
           </a:p>
           <a:p>
             <a:pPr algn="ctr" indent="0" marL="0">
@@ -32550,7 +32550,7 @@
               <a:buNone/>
             </a:pPr>
             <a:r>
-              <a:rPr lang="en-US" sz="1070" b="1" dirty="0">
+              <a:rPr lang="en-US" sz="1050" b="1" dirty="0">
                 <a:solidFill>
                   <a:srgbClr val="052A77"/>
                 </a:solidFill>
@@ -32560,7 +32560,7 @@
               </a:rPr>
               <a:t>승인 신청·국가데이터처 협의는</a:t>
             </a:r>
-            <a:endParaRPr lang="en-US" sz="1070" dirty="0"/>
+            <a:endParaRPr lang="en-US" sz="1050" dirty="0"/>
           </a:p>
           <a:p>
             <a:pPr algn="ctr" indent="0" marL="0">
@@ -32570,7 +32570,7 @@
               <a:buNone/>
             </a:pPr>
             <a:r>
-              <a:rPr lang="en-US" sz="1070" b="1" dirty="0">
+              <a:rPr lang="en-US" sz="1050" b="1" dirty="0">
                 <a:solidFill>
                   <a:srgbClr val="052A77"/>
                 </a:solidFill>
@@ -32580,7 +32580,7 @@
               </a:rPr>
               <a:t>발주기관·소관부처 주관 /</a:t>
             </a:r>
-            <a:endParaRPr lang="en-US" sz="1070" dirty="0"/>
+            <a:endParaRPr lang="en-US" sz="1050" dirty="0"/>
           </a:p>
           <a:p>
             <a:pPr algn="ctr" indent="0" marL="0">
@@ -32590,7 +32590,7 @@
               <a:buNone/>
             </a:pPr>
             <a:r>
-              <a:rPr lang="en-US" sz="1070" b="1" dirty="0">
+              <a:rPr lang="en-US" sz="1050" b="1" dirty="0">
                 <a:solidFill>
                   <a:srgbClr val="052A77"/>
                 </a:solidFill>
@@ -32600,7 +32600,7 @@
               </a:rPr>
               <a:t>본사는 기술문서 작성·설명 지원</a:t>
             </a:r>
-            <a:endParaRPr lang="en-US" sz="1070" dirty="0"/>
+            <a:endParaRPr lang="en-US" sz="1050" dirty="0"/>
           </a:p>
           <a:p>
             <a:pPr algn="ctr" indent="0" marL="0">
@@ -32610,7 +32610,7 @@
               <a:buNone/>
             </a:pPr>
             <a:r>
-              <a:rPr lang="en-US" sz="1070" b="1" dirty="0">
+              <a:rPr lang="en-US" sz="1050" b="1" dirty="0">
                 <a:solidFill>
                   <a:srgbClr val="052A77"/>
                 </a:solidFill>
@@ -32620,7 +32620,7 @@
               </a:rPr>
               <a:t>(RFP 수행역할)</a:t>
             </a:r>
-            <a:endParaRPr lang="en-US" sz="1070" dirty="0"/>
+            <a:endParaRPr lang="en-US" sz="1050" dirty="0"/>
           </a:p>
         </p:txBody>
       </p:sp>
@@ -32910,7 +32910,7 @@
             <a:r>
               <a:rPr lang="en-US" sz="2130" b="1" dirty="0">
                 <a:solidFill>
-                  <a:srgbClr val="DDE1E8"/>
+                  <a:srgbClr val="B9BEC6"/>
                 </a:solidFill>
                 <a:latin typeface="KoPub돋움체 Bold" pitchFamily="34" charset="0"/>
                 <a:ea typeface="KoPub돋움체 Bold" pitchFamily="34" charset="-122"/>
@@ -32952,7 +32952,7 @@
             <a:r>
               <a:rPr lang="en-US" sz="2130" b="1" dirty="0">
                 <a:solidFill>
-                  <a:srgbClr val="DDE1E8"/>
+                  <a:srgbClr val="B9BEC6"/>
                 </a:solidFill>
                 <a:latin typeface="KoPub돋움체 Bold" pitchFamily="34" charset="0"/>
                 <a:ea typeface="KoPub돋움체 Bold" pitchFamily="34" charset="-122"/>
@@ -32992,7 +32992,7 @@
               <a:buNone/>
             </a:pPr>
             <a:r>
-              <a:rPr lang="en-US" sz="1360" b="1" dirty="0">
+              <a:rPr lang="en-US" sz="1320" b="1" dirty="0">
                 <a:solidFill>
                   <a:srgbClr val="1A1A1A"/>
                 </a:solidFill>
@@ -33002,7 +33002,7 @@
               </a:rPr>
               <a:t>본 과업(시범조사)에서 승인 신청까지의 소요 일정을 2년 단계로 제시하고, RFP가 예시한 6개 요소를 단계별로 배치</a:t>
             </a:r>
-            <a:endParaRPr lang="en-US" sz="1360" dirty="0"/>
+            <a:endParaRPr lang="en-US" sz="1320" dirty="0"/>
           </a:p>
         </p:txBody>
       </p:sp>
@@ -35194,7 +35194,7 @@
             <a:r>
               <a:rPr lang="en-US" sz="2205" b="1" dirty="0">
                 <a:solidFill>
-                  <a:srgbClr val="DDE1E8"/>
+                  <a:srgbClr val="B9BEC6"/>
                 </a:solidFill>
                 <a:latin typeface="KoPub돋움체 Bold" pitchFamily="34" charset="0"/>
                 <a:ea typeface="KoPub돋움체 Bold" pitchFamily="34" charset="-122"/>
@@ -35236,7 +35236,7 @@
             <a:r>
               <a:rPr lang="en-US" sz="2205" b="1" dirty="0">
                 <a:solidFill>
-                  <a:srgbClr val="DDE1E8"/>
+                  <a:srgbClr val="B9BEC6"/>
                 </a:solidFill>
                 <a:latin typeface="KoPub돋움체 Bold" pitchFamily="34" charset="0"/>
                 <a:ea typeface="KoPub돋움체 Bold" pitchFamily="34" charset="-122"/>
@@ -36698,7 +36698,7 @@
               <a:buNone/>
             </a:pPr>
             <a:r>
-              <a:rPr lang="en-US" sz="1030" dirty="0">
+              <a:rPr lang="en-US" sz="1010" dirty="0">
                 <a:solidFill>
                   <a:srgbClr val="1A1A1A"/>
                 </a:solidFill>
@@ -36708,7 +36708,7 @@
               </a:rPr>
               <a:t>업종 30개 분류 원자료 보존, 10차↔11차 연계표</a:t>
             </a:r>
-            <a:endParaRPr lang="en-US" sz="1030" dirty="0"/>
+            <a:endParaRPr lang="en-US" sz="1010" dirty="0"/>
           </a:p>
         </p:txBody>
       </p:sp>
